--- a/examples/templates/docuskills_template.pptx
+++ b/examples/templates/docuskills_template.pptx
@@ -152,6 +152,13 @@
           <a:bodyPr/>
           <a:lstStyle/>
           <a:p>
+            <a:pPr>
+              <a:defRPr sz="1600" b="1">
+                <a:solidFill>
+                  <a:srgbClr val="16213F"/>
+                </a:solidFill>
+              </a:defRPr>
+            </a:pPr>
             <a:r>
               <a:t>DocuSkills Corp - FY2026 Revenue</a:t>
             </a:r>
@@ -180,6 +187,11 @@
               </c:strCache>
             </c:strRef>
           </c:tx>
+          <c:spPr>
+            <a:solidFill>
+              <a:srgbClr val="16213F"/>
+            </a:solidFill>
+          </c:spPr>
           <c:cat>
             <c:strRef>
               <c:f>Sheet1!$A$2:$A$5</c:f>
@@ -236,6 +248,11 @@
               </c:strCache>
             </c:strRef>
           </c:tx>
+          <c:spPr>
+            <a:solidFill>
+              <a:srgbClr val="2B7CD3"/>
+            </a:solidFill>
+          </c:spPr>
           <c:cat>
             <c:strRef>
               <c:f>Sheet1!$A$2:$A$5</c:f>
@@ -292,6 +309,11 @@
               </c:strCache>
             </c:strRef>
           </c:tx>
+          <c:spPr>
+            <a:solidFill>
+              <a:srgbClr val="E0742B"/>
+            </a:solidFill>
+          </c:spPr>
           <c:cat>
             <c:strRef>
               <c:f>Sheet1!$A$2:$A$5</c:f>
@@ -347,6 +369,19 @@
         <c:majorTickMark val="out"/>
         <c:minorTickMark val="none"/>
         <c:tickLblPos val="nextTo"/>
+        <c:txPr>
+          <a:bodyPr/>
+          <a:lstStyle/>
+          <a:p>
+            <a:pPr>
+              <a:defRPr>
+                <a:solidFill>
+                  <a:srgbClr val="16213F"/>
+                </a:solidFill>
+              </a:defRPr>
+            </a:pPr>
+          </a:p>
+        </c:txPr>
         <c:crossAx val="-2113994440"/>
         <c:crosses val="autoZero"/>
         <c:auto val="1"/>
@@ -359,10 +394,31 @@
         <c:scaling/>
         <c:delete val="0"/>
         <c:axPos val="l"/>
-        <c:majorGridlines/>
+        <c:majorGridlines>
+          <c:spPr>
+            <a:ln>
+              <a:solidFill>
+                <a:srgbClr val="EAF1FF"/>
+              </a:solidFill>
+            </a:ln>
+          </c:spPr>
+        </c:majorGridlines>
         <c:majorTickMark val="out"/>
         <c:minorTickMark val="none"/>
         <c:tickLblPos val="nextTo"/>
+        <c:txPr>
+          <a:bodyPr/>
+          <a:lstStyle/>
+          <a:p>
+            <a:pPr>
+              <a:defRPr>
+                <a:solidFill>
+                  <a:srgbClr val="16213F"/>
+                </a:solidFill>
+              </a:defRPr>
+            </a:pPr>
+          </a:p>
+        </c:txPr>
         <c:crossAx val="-2068027336"/>
         <c:crosses val="autoZero"/>
       </c:valAx>
@@ -3372,6 +3428,138 @@
       <p:grpSpPr/>
       <p:sp>
         <p:nvSpPr>
+          <p:cNvPr id="6" name="Rectangle 5"/>
+          <p:cNvSpPr/>
+          <p:nvPr/>
+        </p:nvSpPr>
+        <p:spPr>
+          <a:xfrm>
+            <a:off x="685800" y="3200400"/>
+            <a:ext cx="2286000" cy="45720"/>
+          </a:xfrm>
+          <a:prstGeom prst="rect">
+            <a:avLst/>
+          </a:prstGeom>
+          <a:solidFill>
+            <a:srgbClr val="E0742B"/>
+          </a:solidFill>
+          <a:ln>
+            <a:noFill/>
+          </a:ln>
+          <a:effectLst/>
+        </p:spPr>
+        <p:style>
+          <a:lnRef idx="1">
+            <a:schemeClr val="accent1"/>
+          </a:lnRef>
+          <a:fillRef idx="3">
+            <a:schemeClr val="accent1"/>
+          </a:fillRef>
+          <a:effectRef idx="2">
+            <a:schemeClr val="accent1"/>
+          </a:effectRef>
+          <a:fontRef idx="minor">
+            <a:schemeClr val="lt1"/>
+          </a:fontRef>
+        </p:style>
+        <p:txBody>
+          <a:bodyPr rtlCol="0" anchor="ctr"/>
+          <a:lstStyle/>
+          <a:p>
+            <a:pPr algn="ctr"/>
+          </a:p>
+        </p:txBody>
+      </p:sp>
+      <p:sp>
+        <p:nvSpPr>
+          <p:cNvPr id="5" name="Rectangle 4"/>
+          <p:cNvSpPr/>
+          <p:nvPr/>
+        </p:nvSpPr>
+        <p:spPr>
+          <a:xfrm>
+            <a:off x="0" y="228600"/>
+            <a:ext cx="9144000" cy="45720"/>
+          </a:xfrm>
+          <a:prstGeom prst="rect">
+            <a:avLst/>
+          </a:prstGeom>
+          <a:solidFill>
+            <a:srgbClr val="E0742B"/>
+          </a:solidFill>
+          <a:ln>
+            <a:noFill/>
+          </a:ln>
+          <a:effectLst/>
+        </p:spPr>
+        <p:style>
+          <a:lnRef idx="1">
+            <a:schemeClr val="accent1"/>
+          </a:lnRef>
+          <a:fillRef idx="3">
+            <a:schemeClr val="accent1"/>
+          </a:fillRef>
+          <a:effectRef idx="2">
+            <a:schemeClr val="accent1"/>
+          </a:effectRef>
+          <a:fontRef idx="minor">
+            <a:schemeClr val="lt1"/>
+          </a:fontRef>
+        </p:style>
+        <p:txBody>
+          <a:bodyPr rtlCol="0" anchor="ctr"/>
+          <a:lstStyle/>
+          <a:p>
+            <a:pPr algn="ctr"/>
+          </a:p>
+        </p:txBody>
+      </p:sp>
+      <p:sp>
+        <p:nvSpPr>
+          <p:cNvPr id="4" name="Rectangle 3"/>
+          <p:cNvSpPr/>
+          <p:nvPr/>
+        </p:nvSpPr>
+        <p:spPr>
+          <a:xfrm>
+            <a:off x="0" y="0"/>
+            <a:ext cx="9144000" cy="228600"/>
+          </a:xfrm>
+          <a:prstGeom prst="rect">
+            <a:avLst/>
+          </a:prstGeom>
+          <a:solidFill>
+            <a:srgbClr val="16213F"/>
+          </a:solidFill>
+          <a:ln>
+            <a:noFill/>
+          </a:ln>
+          <a:effectLst/>
+        </p:spPr>
+        <p:style>
+          <a:lnRef idx="1">
+            <a:schemeClr val="accent1"/>
+          </a:lnRef>
+          <a:fillRef idx="3">
+            <a:schemeClr val="accent1"/>
+          </a:fillRef>
+          <a:effectRef idx="2">
+            <a:schemeClr val="accent1"/>
+          </a:effectRef>
+          <a:fontRef idx="minor">
+            <a:schemeClr val="lt1"/>
+          </a:fontRef>
+        </p:style>
+        <p:txBody>
+          <a:bodyPr rtlCol="0" anchor="ctr"/>
+          <a:lstStyle/>
+          <a:p>
+            <a:pPr algn="ctr"/>
+          </a:p>
+        </p:txBody>
+      </p:sp>
+      <p:sp>
+        <p:nvSpPr>
           <p:cNvPr id="2" name="Title 1"/>
           <p:cNvSpPr>
             <a:spLocks noGrp="1"/>
@@ -3380,7 +3568,11 @@
             <p:ph type="ctrTitle"/>
           </p:nvPr>
         </p:nvSpPr>
-        <p:spPr/>
+        <p:spPr>
+          <a:xfrm>
+            <a:off x="0" y="2057400"/>
+          </a:xfrm>
+        </p:spPr>
         <p:txBody>
           <a:bodyPr/>
           <a:lstStyle/>
@@ -3406,7 +3598,11 @@
             <p:ph type="subTitle" idx="1"/>
           </p:nvPr>
         </p:nvSpPr>
-        <p:spPr/>
+        <p:spPr>
+          <a:xfrm>
+            <a:off x="0" y="3429000"/>
+          </a:xfrm>
+        </p:spPr>
         <p:txBody>
           <a:bodyPr/>
           <a:lstStyle/>
@@ -3424,7 +3620,7 @@
       </p:sp>
       <p:pic>
         <p:nvPicPr>
-          <p:cNvPr id="4" name="Picture 3" descr="docuskills_template_mark.png"/>
+          <p:cNvPr id="7" name="Picture 6" descr="docuskills_template_mark.png"/>
           <p:cNvPicPr>
             <a:picLocks noChangeAspect="1"/>
           </p:cNvPicPr>
@@ -3439,7 +3635,7 @@
         <p:spPr>
           <a:xfrm>
             <a:off x="457200" y="457200"/>
-            <a:ext cx="1097280" cy="457200"/>
+            <a:ext cx="914400" cy="914400"/>
           </a:xfrm>
           <a:prstGeom prst="rect">
             <a:avLst/>
@@ -3466,6 +3662,50 @@
       <p:grpSpPr/>
       <p:sp>
         <p:nvSpPr>
+          <p:cNvPr id="4" name="Rectangle 3"/>
+          <p:cNvSpPr/>
+          <p:nvPr/>
+        </p:nvSpPr>
+        <p:spPr>
+          <a:xfrm>
+            <a:off x="457200" y="2057400"/>
+            <a:ext cx="91440" cy="3429000"/>
+          </a:xfrm>
+          <a:prstGeom prst="rect">
+            <a:avLst/>
+          </a:prstGeom>
+          <a:solidFill>
+            <a:srgbClr val="E0742B"/>
+          </a:solidFill>
+          <a:ln>
+            <a:noFill/>
+          </a:ln>
+          <a:effectLst/>
+        </p:spPr>
+        <p:style>
+          <a:lnRef idx="1">
+            <a:schemeClr val="accent1"/>
+          </a:lnRef>
+          <a:fillRef idx="3">
+            <a:schemeClr val="accent1"/>
+          </a:fillRef>
+          <a:effectRef idx="2">
+            <a:schemeClr val="accent1"/>
+          </a:effectRef>
+          <a:fontRef idx="minor">
+            <a:schemeClr val="lt1"/>
+          </a:fontRef>
+        </p:style>
+        <p:txBody>
+          <a:bodyPr rtlCol="0" anchor="ctr"/>
+          <a:lstStyle/>
+          <a:p>
+            <a:pPr algn="ctr"/>
+          </a:p>
+        </p:txBody>
+      </p:sp>
+      <p:sp>
+        <p:nvSpPr>
           <p:cNvPr id="2" name="Title 1"/>
           <p:cNvSpPr>
             <a:spLocks noGrp="1"/>
@@ -3474,7 +3714,12 @@
             <p:ph type="title"/>
           </p:nvPr>
         </p:nvSpPr>
-        <p:spPr/>
+        <p:spPr>
+          <a:xfrm>
+            <a:off x="685800" y="2057400"/>
+            <a:ext cx="7772400" cy="1143000"/>
+          </a:xfrm>
+        </p:spPr>
         <p:txBody>
           <a:bodyPr/>
           <a:lstStyle/>
@@ -3500,9 +3745,14 @@
             <p:ph type="body" idx="1"/>
           </p:nvPr>
         </p:nvSpPr>
-        <p:spPr/>
-        <p:txBody>
-          <a:bodyPr/>
+        <p:spPr>
+          <a:xfrm>
+            <a:off x="685800" y="3429000"/>
+            <a:ext cx="7772400" cy="2286000"/>
+          </a:xfrm>
+        </p:spPr>
+        <p:txBody>
+          <a:bodyPr anchor="t"/>
           <a:lstStyle/>
           <a:p>
             <a:pPr/>
@@ -3605,7 +3855,7 @@
                   <a:srgbClr val="16213F"/>
                 </a:solidFill>
               </a:rPr>
-              <a:t>DocuSkills Corp grew net revenue 18% YoY across all four regions.</a:t>
+              <a:t>DocuSkills Corp grew net revenue 18% YoY across all three reported regions.</a:t>
             </a:r>
           </a:p>
           <a:p>
@@ -3649,7 +3899,7 @@
                   <a:srgbClr val="16213F"/>
                 </a:solidFill>
               </a:rPr>
-              <a:t>Key risk: input-cost volatility in the Gadget line.</a:t>
+              <a:t>Key risk: input-cost volatility in the hardware segment.</a:t>
             </a:r>
           </a:p>
         </p:txBody>
@@ -3708,7 +3958,7 @@
         </p:nvGraphicFramePr>
         <p:xfrm>
           <a:off x="457200" y="1828800"/>
-          <a:ext cx="8229600" cy="3200400"/>
+          <a:ext cx="8229600" cy="2743200"/>
         </p:xfrm>
         <a:graphic>
           <a:graphicData uri="http://schemas.openxmlformats.org/drawingml/2006/table">
@@ -3723,7 +3973,7 @@
                 <a:gridCol w="1645920"/>
                 <a:gridCol w="1645920"/>
               </a:tblGrid>
-              <a:tr h="640080">
+              <a:tr h="548640">
                 <a:tc>
                   <a:txBody>
                     <a:bodyPr/>
@@ -3830,7 +4080,7 @@
                   </a:tcPr>
                 </a:tc>
               </a:tr>
-              <a:tr h="640080">
+              <a:tr h="548640">
                 <a:tc>
                   <a:txBody>
                     <a:bodyPr/>
@@ -3937,7 +4187,7 @@
                   </a:tcPr>
                 </a:tc>
               </a:tr>
-              <a:tr h="640080">
+              <a:tr h="548640">
                 <a:tc>
                   <a:txBody>
                     <a:bodyPr/>
@@ -4044,7 +4294,7 @@
                   </a:tcPr>
                 </a:tc>
               </a:tr>
-              <a:tr h="640080">
+              <a:tr h="548640">
                 <a:tc>
                   <a:txBody>
                     <a:bodyPr/>
@@ -4151,7 +4401,7 @@
                   </a:tcPr>
                 </a:tc>
               </a:tr>
-              <a:tr h="640080">
+              <a:tr h="548640">
                 <a:tc>
                   <a:txBody>
                     <a:bodyPr/>
@@ -4352,7 +4602,11 @@
             <p:ph type="title"/>
           </p:nvPr>
         </p:nvSpPr>
-        <p:spPr/>
+        <p:spPr>
+          <a:xfrm>
+            <a:off x="0" y="3429000"/>
+          </a:xfrm>
+        </p:spPr>
         <p:txBody>
           <a:bodyPr/>
           <a:lstStyle/>
@@ -4380,12 +4634,17 @@
         </p:nvPicPr>
         <p:blipFill>
           <a:blip r:embed="rId2"/>
-          <a:srcRect l="22222" r="22222"/>
+          <a:srcRect/>
           <a:stretch>
             <a:fillRect/>
           </a:stretch>
         </p:blipFill>
-        <p:spPr/>
+        <p:spPr>
+          <a:xfrm>
+            <a:off x="3429000" y="914400"/>
+            <a:ext cx="2286000" cy="2286000"/>
+          </a:xfrm>
+        </p:spPr>
       </p:pic>
       <p:sp>
         <p:nvSpPr>
@@ -4397,7 +4656,11 @@
             <p:ph type="body" idx="2" sz="half"/>
           </p:nvPr>
         </p:nvSpPr>
-        <p:spPr/>
+        <p:spPr>
+          <a:xfrm>
+            <a:off x="0" y="4114800"/>
+          </a:xfrm>
+        </p:spPr>
         <p:txBody>
           <a:bodyPr/>
           <a:lstStyle/>
@@ -4420,7 +4683,7 @@
                   <a:srgbClr val="16213F"/>
                 </a:solidFill>
               </a:rPr>
-              <a:t>Navy field, amber stripe, teal corner.</a:t>
+              <a:t>Navy rounded tile, blue stroke, blue header bar, outlined field.</a:t>
             </a:r>
           </a:p>
         </p:txBody>
@@ -4441,8 +4704,8 @@
         </p:blipFill>
         <p:spPr>
           <a:xfrm>
-            <a:off x="5486400" y="1828800"/>
-            <a:ext cx="2194560" cy="914400"/>
+            <a:off x="457200" y="457200"/>
+            <a:ext cx="457200" cy="457200"/>
           </a:xfrm>
           <a:prstGeom prst="rect">
             <a:avLst/>
@@ -4510,11 +4773,12 @@
           <a:solidFill>
             <a:srgbClr val="16213F"/>
           </a:solidFill>
-          <a:ln>
+          <a:ln w="19050">
             <a:solidFill>
               <a:srgbClr val="5778B0"/>
             </a:solidFill>
           </a:ln>
+          <a:effectLst/>
         </p:spPr>
         <p:style>
           <a:lnRef idx="1">
@@ -4548,7 +4812,41 @@
       </p:sp>
       <p:sp>
         <p:nvSpPr>
-          <p:cNvPr id="4" name="Rounded Rectangle 3"/>
+          <p:cNvPr id="4" name="TextBox 3"/>
+          <p:cNvSpPr txBox="1"/>
+          <p:nvPr/>
+        </p:nvSpPr>
+        <p:spPr>
+          <a:xfrm>
+            <a:off x="685800" y="3977640"/>
+            <a:ext cx="2286000" cy="457200"/>
+          </a:xfrm>
+          <a:prstGeom prst="rect">
+            <a:avLst/>
+          </a:prstGeom>
+          <a:noFill/>
+        </p:spPr>
+        <p:txBody>
+          <a:bodyPr wrap="square">
+            <a:spAutoFit/>
+          </a:bodyPr>
+          <a:lstStyle/>
+          <a:p>
+            <a:pPr algn="ctr"/>
+            <a:r>
+              <a:rPr sz="1200">
+                <a:solidFill>
+                  <a:srgbClr val="5778B0"/>
+                </a:solidFill>
+              </a:rPr>
+              <a:t>Validate the opportunity</a:t>
+            </a:r>
+          </a:p>
+        </p:txBody>
+      </p:sp>
+      <p:sp>
+        <p:nvSpPr>
+          <p:cNvPr id="5" name="Rounded Rectangle 4"/>
           <p:cNvSpPr/>
           <p:nvPr/>
         </p:nvSpPr>
@@ -4563,11 +4861,12 @@
           <a:solidFill>
             <a:srgbClr val="2B7CD3"/>
           </a:solidFill>
-          <a:ln>
+          <a:ln w="19050">
             <a:solidFill>
               <a:srgbClr val="5778B0"/>
             </a:solidFill>
           </a:ln>
+          <a:effectLst/>
         </p:spPr>
         <p:style>
           <a:lnRef idx="1">
@@ -4601,7 +4900,7 @@
       </p:sp>
       <p:cxnSp>
         <p:nvCxnSpPr>
-          <p:cNvPr id="5" name="Connector 4"/>
+          <p:cNvPr id="6" name="Connector 5"/>
           <p:cNvCxnSpPr/>
           <p:nvPr/>
         </p:nvCxnSpPr>
@@ -4636,7 +4935,41 @@
       </p:cxnSp>
       <p:sp>
         <p:nvSpPr>
-          <p:cNvPr id="6" name="Rounded Rectangle 5"/>
+          <p:cNvPr id="7" name="TextBox 6"/>
+          <p:cNvSpPr txBox="1"/>
+          <p:nvPr/>
+        </p:nvSpPr>
+        <p:spPr>
+          <a:xfrm>
+            <a:off x="3429000" y="3977640"/>
+            <a:ext cx="2286000" cy="457200"/>
+          </a:xfrm>
+          <a:prstGeom prst="rect">
+            <a:avLst/>
+          </a:prstGeom>
+          <a:noFill/>
+        </p:spPr>
+        <p:txBody>
+          <a:bodyPr wrap="square">
+            <a:spAutoFit/>
+          </a:bodyPr>
+          <a:lstStyle/>
+          <a:p>
+            <a:pPr algn="ctr"/>
+            <a:r>
+              <a:rPr sz="1200">
+                <a:solidFill>
+                  <a:srgbClr val="5778B0"/>
+                </a:solidFill>
+              </a:rPr>
+              <a:t>Ship the MVP</a:t>
+            </a:r>
+          </a:p>
+        </p:txBody>
+      </p:sp>
+      <p:sp>
+        <p:nvSpPr>
+          <p:cNvPr id="8" name="Rounded Rectangle 7"/>
           <p:cNvSpPr/>
           <p:nvPr/>
         </p:nvSpPr>
@@ -4651,11 +4984,12 @@
           <a:solidFill>
             <a:srgbClr val="E0742B"/>
           </a:solidFill>
-          <a:ln>
+          <a:ln w="19050">
             <a:solidFill>
               <a:srgbClr val="5778B0"/>
             </a:solidFill>
           </a:ln>
+          <a:effectLst/>
         </p:spPr>
         <p:style>
           <a:lnRef idx="1">
@@ -4689,7 +5023,7 @@
       </p:sp>
       <p:cxnSp>
         <p:nvCxnSpPr>
-          <p:cNvPr id="7" name="Connector 6"/>
+          <p:cNvPr id="9" name="Connector 8"/>
           <p:cNvCxnSpPr/>
           <p:nvPr/>
         </p:nvCxnSpPr>
@@ -4722,6 +5056,40 @@
           </a:fontRef>
         </p:style>
       </p:cxnSp>
+      <p:sp>
+        <p:nvSpPr>
+          <p:cNvPr id="10" name="TextBox 9"/>
+          <p:cNvSpPr txBox="1"/>
+          <p:nvPr/>
+        </p:nvSpPr>
+        <p:spPr>
+          <a:xfrm>
+            <a:off x="6172200" y="3977640"/>
+            <a:ext cx="2286000" cy="457200"/>
+          </a:xfrm>
+          <a:prstGeom prst="rect">
+            <a:avLst/>
+          </a:prstGeom>
+          <a:noFill/>
+        </p:spPr>
+        <p:txBody>
+          <a:bodyPr wrap="square">
+            <a:spAutoFit/>
+          </a:bodyPr>
+          <a:lstStyle/>
+          <a:p>
+            <a:pPr algn="ctr"/>
+            <a:r>
+              <a:rPr sz="1200">
+                <a:solidFill>
+                  <a:srgbClr val="5778B0"/>
+                </a:solidFill>
+              </a:rPr>
+              <a:t>Grow to new regions</a:t>
+            </a:r>
+          </a:p>
+        </p:txBody>
+      </p:sp>
     </p:spTree>
   </p:cSld>
   <p:clrMapOvr>
@@ -4742,6 +5110,138 @@
       <p:grpSpPr/>
       <p:sp>
         <p:nvSpPr>
+          <p:cNvPr id="5" name="Rectangle 4"/>
+          <p:cNvSpPr/>
+          <p:nvPr/>
+        </p:nvSpPr>
+        <p:spPr>
+          <a:xfrm>
+            <a:off x="0" y="6629400"/>
+            <a:ext cx="9144000" cy="228600"/>
+          </a:xfrm>
+          <a:prstGeom prst="rect">
+            <a:avLst/>
+          </a:prstGeom>
+          <a:solidFill>
+            <a:srgbClr val="16213F"/>
+          </a:solidFill>
+          <a:ln>
+            <a:noFill/>
+          </a:ln>
+          <a:effectLst/>
+        </p:spPr>
+        <p:style>
+          <a:lnRef idx="1">
+            <a:schemeClr val="accent1"/>
+          </a:lnRef>
+          <a:fillRef idx="3">
+            <a:schemeClr val="accent1"/>
+          </a:fillRef>
+          <a:effectRef idx="2">
+            <a:schemeClr val="accent1"/>
+          </a:effectRef>
+          <a:fontRef idx="minor">
+            <a:schemeClr val="lt1"/>
+          </a:fontRef>
+        </p:style>
+        <p:txBody>
+          <a:bodyPr rtlCol="0" anchor="ctr"/>
+          <a:lstStyle/>
+          <a:p>
+            <a:pPr algn="ctr"/>
+          </a:p>
+        </p:txBody>
+      </p:sp>
+      <p:sp>
+        <p:nvSpPr>
+          <p:cNvPr id="4" name="Rectangle 3"/>
+          <p:cNvSpPr/>
+          <p:nvPr/>
+        </p:nvSpPr>
+        <p:spPr>
+          <a:xfrm>
+            <a:off x="0" y="228600"/>
+            <a:ext cx="9144000" cy="45720"/>
+          </a:xfrm>
+          <a:prstGeom prst="rect">
+            <a:avLst/>
+          </a:prstGeom>
+          <a:solidFill>
+            <a:srgbClr val="E0742B"/>
+          </a:solidFill>
+          <a:ln>
+            <a:noFill/>
+          </a:ln>
+          <a:effectLst/>
+        </p:spPr>
+        <p:style>
+          <a:lnRef idx="1">
+            <a:schemeClr val="accent1"/>
+          </a:lnRef>
+          <a:fillRef idx="3">
+            <a:schemeClr val="accent1"/>
+          </a:fillRef>
+          <a:effectRef idx="2">
+            <a:schemeClr val="accent1"/>
+          </a:effectRef>
+          <a:fontRef idx="minor">
+            <a:schemeClr val="lt1"/>
+          </a:fontRef>
+        </p:style>
+        <p:txBody>
+          <a:bodyPr rtlCol="0" anchor="ctr"/>
+          <a:lstStyle/>
+          <a:p>
+            <a:pPr algn="ctr"/>
+          </a:p>
+        </p:txBody>
+      </p:sp>
+      <p:sp>
+        <p:nvSpPr>
+          <p:cNvPr id="3" name="Rectangle 2"/>
+          <p:cNvSpPr/>
+          <p:nvPr/>
+        </p:nvSpPr>
+        <p:spPr>
+          <a:xfrm>
+            <a:off x="0" y="0"/>
+            <a:ext cx="9144000" cy="228600"/>
+          </a:xfrm>
+          <a:prstGeom prst="rect">
+            <a:avLst/>
+          </a:prstGeom>
+          <a:solidFill>
+            <a:srgbClr val="16213F"/>
+          </a:solidFill>
+          <a:ln>
+            <a:noFill/>
+          </a:ln>
+          <a:effectLst/>
+        </p:spPr>
+        <p:style>
+          <a:lnRef idx="1">
+            <a:schemeClr val="accent1"/>
+          </a:lnRef>
+          <a:fillRef idx="3">
+            <a:schemeClr val="accent1"/>
+          </a:fillRef>
+          <a:effectRef idx="2">
+            <a:schemeClr val="accent1"/>
+          </a:effectRef>
+          <a:fontRef idx="minor">
+            <a:schemeClr val="lt1"/>
+          </a:fontRef>
+        </p:style>
+        <p:txBody>
+          <a:bodyPr rtlCol="0" anchor="ctr"/>
+          <a:lstStyle/>
+          <a:p>
+            <a:pPr algn="ctr"/>
+          </a:p>
+        </p:txBody>
+      </p:sp>
+      <p:sp>
+        <p:nvSpPr>
           <p:cNvPr id="2" name="Title 1"/>
           <p:cNvSpPr>
             <a:spLocks noGrp="1"/>
@@ -4781,6 +5281,50 @@
       <p:grpSpPr/>
       <p:sp>
         <p:nvSpPr>
+          <p:cNvPr id="4" name="Rectangle 3"/>
+          <p:cNvSpPr/>
+          <p:nvPr/>
+        </p:nvSpPr>
+        <p:spPr>
+          <a:xfrm>
+            <a:off x="457200" y="2057400"/>
+            <a:ext cx="91440" cy="3429000"/>
+          </a:xfrm>
+          <a:prstGeom prst="rect">
+            <a:avLst/>
+          </a:prstGeom>
+          <a:solidFill>
+            <a:srgbClr val="E0742B"/>
+          </a:solidFill>
+          <a:ln>
+            <a:noFill/>
+          </a:ln>
+          <a:effectLst/>
+        </p:spPr>
+        <p:style>
+          <a:lnRef idx="1">
+            <a:schemeClr val="accent1"/>
+          </a:lnRef>
+          <a:fillRef idx="3">
+            <a:schemeClr val="accent1"/>
+          </a:fillRef>
+          <a:effectRef idx="2">
+            <a:schemeClr val="accent1"/>
+          </a:effectRef>
+          <a:fontRef idx="minor">
+            <a:schemeClr val="lt1"/>
+          </a:fontRef>
+        </p:style>
+        <p:txBody>
+          <a:bodyPr rtlCol="0" anchor="ctr"/>
+          <a:lstStyle/>
+          <a:p>
+            <a:pPr algn="ctr"/>
+          </a:p>
+        </p:txBody>
+      </p:sp>
+      <p:sp>
+        <p:nvSpPr>
           <p:cNvPr id="2" name="Title 1"/>
           <p:cNvSpPr>
             <a:spLocks noGrp="1"/>
@@ -4789,7 +5333,12 @@
             <p:ph type="title"/>
           </p:nvPr>
         </p:nvSpPr>
-        <p:spPr/>
+        <p:spPr>
+          <a:xfrm>
+            <a:off x="685800" y="2057400"/>
+            <a:ext cx="7772400" cy="1143000"/>
+          </a:xfrm>
+        </p:spPr>
         <p:txBody>
           <a:bodyPr/>
           <a:lstStyle/>
@@ -4815,9 +5364,14 @@
             <p:ph type="body" idx="1"/>
           </p:nvPr>
         </p:nvSpPr>
-        <p:spPr/>
-        <p:txBody>
-          <a:bodyPr/>
+        <p:spPr>
+          <a:xfrm>
+            <a:off x="685800" y="3429000"/>
+            <a:ext cx="7772400" cy="2286000"/>
+          </a:xfrm>
+        </p:spPr>
+        <p:txBody>
+          <a:bodyPr anchor="t"/>
           <a:lstStyle/>
           <a:p>
             <a:pPr/>
